--- a/蟹工船様LINE公式アカウント運用・特典のご提案.pptx
+++ b/蟹工船様LINE公式アカウント運用・特典のご提案.pptx
@@ -246,7 +246,7 @@
           <a:p>
             <a:fld id="{9419EFD4-15CD-40C2-A220-512208384092}" type="datetimeFigureOut">
               <a:rPr kumimoji="1" lang="ja-JP" altLang="en-US" smtClean="0"/>
-              <a:t>2026/10/16</a:t>
+              <a:t>2026/10/21</a:t>
             </a:fld>
             <a:endParaRPr kumimoji="1" lang="ja-JP" altLang="en-US"/>
           </a:p>
@@ -412,7 +412,7 @@
             <a:fld id="{A811CA1F-CBC6-4416-AD50-3C64E4A227D9}" type="datetimeFigureOut">
               <a:rPr kumimoji="1" lang="ja-JP" altLang="en-US" smtClean="0"/>
               <a:pPr/>
-              <a:t>2026/10/16</a:t>
+              <a:t>2026/10/21</a:t>
             </a:fld>
             <a:endParaRPr kumimoji="1" lang="ja-JP" altLang="en-US"/>
           </a:p>
@@ -1030,7 +1030,7 @@
             <a:fld id="{938A80E6-8F9F-4F6D-B5CB-F870B1E21ECA}" type="datetime1">
               <a:rPr kumimoji="1" lang="ja-JP" altLang="en-US" smtClean="0"/>
               <a:pPr/>
-              <a:t>2026/10/16</a:t>
+              <a:t>2026/10/21</a:t>
             </a:fld>
             <a:endParaRPr kumimoji="1" lang="ja-JP" altLang="en-US"/>
           </a:p>
@@ -1234,7 +1234,7 @@
             <a:fld id="{2CD830B0-6D79-4FD5-A4C0-EF1475B25D88}" type="datetime1">
               <a:rPr kumimoji="1" lang="ja-JP" altLang="en-US" smtClean="0"/>
               <a:pPr/>
-              <a:t>2026/10/16</a:t>
+              <a:t>2026/10/21</a:t>
             </a:fld>
             <a:endParaRPr kumimoji="1" lang="ja-JP" altLang="en-US"/>
           </a:p>
@@ -1448,7 +1448,7 @@
             <a:fld id="{4979E9CC-AD96-4AD0-84B2-246C4B8E0998}" type="datetime1">
               <a:rPr kumimoji="1" lang="ja-JP" altLang="en-US" smtClean="0"/>
               <a:pPr/>
-              <a:t>2026/10/16</a:t>
+              <a:t>2026/10/21</a:t>
             </a:fld>
             <a:endParaRPr kumimoji="1" lang="ja-JP" altLang="en-US"/>
           </a:p>
@@ -2302,7 +2302,7 @@
             <a:fld id="{A8A47E6C-0212-4372-B82D-7ABB435F7E95}" type="datetime1">
               <a:rPr kumimoji="1" lang="ja-JP" altLang="en-US" smtClean="0"/>
               <a:pPr/>
-              <a:t>2026/10/16</a:t>
+              <a:t>2026/10/21</a:t>
             </a:fld>
             <a:endParaRPr kumimoji="1" lang="ja-JP" altLang="en-US"/>
           </a:p>
@@ -2735,7 +2735,7 @@
             <a:fld id="{ED40E438-6206-45D4-9E7D-73689BD1EE2E}" type="datetime1">
               <a:rPr kumimoji="1" lang="ja-JP" altLang="en-US" smtClean="0"/>
               <a:pPr/>
-              <a:t>2026/10/16</a:t>
+              <a:t>2026/10/21</a:t>
             </a:fld>
             <a:endParaRPr kumimoji="1" lang="ja-JP" altLang="en-US"/>
           </a:p>
@@ -2885,7 +2885,7 @@
             <a:fld id="{962BDDE3-EBF6-4FA2-AC54-0EE1201806F3}" type="datetime1">
               <a:rPr kumimoji="1" lang="ja-JP" altLang="en-US" smtClean="0"/>
               <a:pPr/>
-              <a:t>2026/10/16</a:t>
+              <a:t>2026/10/21</a:t>
             </a:fld>
             <a:endParaRPr kumimoji="1" lang="ja-JP" altLang="en-US"/>
           </a:p>
@@ -3196,7 +3196,7 @@
             <a:fld id="{D7907B9C-3321-43D5-A6AB-834DC3297F2B}" type="datetime1">
               <a:rPr kumimoji="1" lang="ja-JP" altLang="en-US" smtClean="0"/>
               <a:pPr/>
-              <a:t>2026/10/16</a:t>
+              <a:t>2026/10/21</a:t>
             </a:fld>
             <a:endParaRPr kumimoji="1" lang="ja-JP" altLang="en-US"/>
           </a:p>
@@ -3443,7 +3443,7 @@
             <a:fld id="{14709FE6-9F7F-4475-A799-F09E5B44CDB3}" type="datetime1">
               <a:rPr kumimoji="1" lang="ja-JP" altLang="en-US" smtClean="0"/>
               <a:pPr/>
-              <a:t>2026/10/16</a:t>
+              <a:t>2026/10/21</a:t>
             </a:fld>
             <a:endParaRPr kumimoji="1" lang="ja-JP" altLang="en-US"/>
           </a:p>
@@ -3940,42 +3940,42 @@
           <a:p>
             <a:pPr algn="ctr"/>
             <a:r>
-              <a:rPr kumimoji="1" lang="en-US" altLang="ja-JP" sz="1200">
+              <a:rPr kumimoji="1" lang="en-US" altLang="ja-JP" sz="1200" dirty="0">
                 <a:latin typeface="メイリオ"/>
                 <a:ea typeface="メイリオ"/>
               </a:rPr>
               <a:t>2026</a:t>
             </a:r>
             <a:r>
-              <a:rPr kumimoji="1" lang="ja-JP" altLang="en-US" sz="1200">
+              <a:rPr kumimoji="1" lang="ja-JP" altLang="en-US" sz="1200" dirty="0">
                 <a:latin typeface="メイリオ"/>
                 <a:ea typeface="メイリオ"/>
               </a:rPr>
               <a:t>年</a:t>
             </a:r>
             <a:r>
-              <a:rPr kumimoji="1" lang="en-US" altLang="ja-JP" sz="1200">
+              <a:rPr kumimoji="1" lang="en-US" altLang="ja-JP" sz="1200" dirty="0">
                 <a:latin typeface="メイリオ"/>
                 <a:ea typeface="メイリオ"/>
               </a:rPr>
               <a:t>10</a:t>
             </a:r>
             <a:r>
-              <a:rPr kumimoji="1" lang="ja-JP" altLang="en-US" sz="1200">
+              <a:rPr kumimoji="1" lang="ja-JP" altLang="en-US" sz="1200" dirty="0">
                 <a:latin typeface="メイリオ"/>
                 <a:ea typeface="メイリオ"/>
               </a:rPr>
               <a:t>月</a:t>
             </a:r>
             <a:r>
-              <a:rPr kumimoji="1" lang="en-US" altLang="ja-JP" sz="1200">
+              <a:rPr kumimoji="1" lang="en-US" altLang="ja-JP" sz="1200" dirty="0">
                 <a:latin typeface="メイリオ"/>
                 <a:ea typeface="メイリオ"/>
               </a:rPr>
-              <a:t>16</a:t>
-            </a:r>
-            <a:r>
-              <a:rPr kumimoji="1" lang="ja-JP" altLang="en-US" sz="1200">
+              <a:t>21</a:t>
+            </a:r>
+            <a:r>
+              <a:rPr kumimoji="1" lang="ja-JP" altLang="en-US" sz="1200" dirty="0">
                 <a:latin typeface="メイリオ"/>
                 <a:ea typeface="メイリオ"/>
               </a:rPr>
@@ -4797,7 +4797,7 @@
             </a:r>
             <a:r>
               <a:rPr lang="ja-JP" altLang="en-US" sz="1200" dirty="0"/>
-              <a:t>個）たまるとお会計から </a:t>
+              <a:t>個）たまるとお会計から</a:t>
             </a:r>
             <a:r>
               <a:rPr lang="en-US" altLang="ja-JP" sz="1200" dirty="0"/>
@@ -5152,13 +5152,13 @@
               </a:lnSpc>
             </a:pPr>
             <a:r>
-              <a:rPr lang="ja-JP" sz="1100" b="1">
-                <a:ea typeface="+mn-lt"/>
-                <a:cs typeface="+mn-lt"/>
-              </a:rPr>
-              <a:t>② 「本日限定の特別な仕入れ」などのお知らせ</a:t>
-            </a:r>
-            <a:endParaRPr lang="ja-JP"/>
+              <a:rPr lang="ja-JP" sz="1100" b="1" dirty="0">
+                <a:ea typeface="+mn-lt"/>
+                <a:cs typeface="+mn-lt"/>
+              </a:rPr>
+              <a:t>②「本日限定の特別な仕入れ」などのお知らせ</a:t>
+            </a:r>
+            <a:endParaRPr lang="ja-JP" dirty="0"/>
           </a:p>
           <a:p>
             <a:pPr>
@@ -5167,63 +5167,63 @@
               </a:lnSpc>
             </a:pPr>
             <a:r>
-              <a:rPr lang="ja-JP" sz="1000">
+              <a:rPr lang="ja-JP" sz="1000" dirty="0">
                 <a:ea typeface="+mn-lt"/>
                 <a:cs typeface="+mn-lt"/>
               </a:rPr>
               <a:t>その日の入荷状況</a:t>
             </a:r>
             <a:r>
-              <a:rPr lang="ja-JP" altLang="en-US" sz="1000">
+              <a:rPr lang="ja-JP" altLang="en-US" sz="1000" dirty="0">
                 <a:ea typeface="+mn-lt"/>
                 <a:cs typeface="+mn-lt"/>
               </a:rPr>
               <a:t>に合わせて、本日限定</a:t>
             </a:r>
             <a:r>
-              <a:rPr lang="ja-JP" sz="1000">
+              <a:rPr lang="ja-JP" sz="1000" dirty="0">
                 <a:ea typeface="+mn-lt"/>
                 <a:cs typeface="+mn-lt"/>
               </a:rPr>
               <a:t>のおすすめ</a:t>
             </a:r>
             <a:r>
-              <a:rPr lang="ja-JP" altLang="en-US" sz="1000">
+              <a:rPr lang="ja-JP" altLang="en-US" sz="1000" dirty="0">
                 <a:ea typeface="+mn-lt"/>
                 <a:cs typeface="+mn-lt"/>
               </a:rPr>
               <a:t>商品やお得</a:t>
             </a:r>
             <a:r>
-              <a:rPr lang="ja-JP" sz="1000">
+              <a:rPr lang="ja-JP" sz="1000" dirty="0">
                 <a:ea typeface="+mn-lt"/>
                 <a:cs typeface="+mn-lt"/>
               </a:rPr>
               <a:t>情報を</a:t>
             </a:r>
             <a:r>
-              <a:rPr lang="ja-JP" altLang="en-US" sz="1000">
+              <a:rPr lang="ja-JP" altLang="en-US" sz="1000" dirty="0">
                 <a:ea typeface="+mn-lt"/>
                 <a:cs typeface="+mn-lt"/>
               </a:rPr>
               <a:t>リアルタイムで</a:t>
             </a:r>
             <a:r>
-              <a:rPr lang="ja-JP" sz="1000">
+              <a:rPr lang="ja-JP" sz="1000" dirty="0">
                 <a:ea typeface="+mn-lt"/>
                 <a:cs typeface="+mn-lt"/>
               </a:rPr>
               <a:t>配信し、お店に</a:t>
             </a:r>
             <a:r>
-              <a:rPr lang="ja-JP" altLang="en-US" sz="1000">
+              <a:rPr lang="ja-JP" altLang="en-US" sz="1000" dirty="0">
                 <a:ea typeface="+mn-lt"/>
                 <a:cs typeface="+mn-lt"/>
               </a:rPr>
               <a:t>足を運んでいただく</a:t>
             </a:r>
             <a:r>
-              <a:rPr lang="ja-JP" sz="1000">
+              <a:rPr lang="ja-JP" sz="1000" dirty="0">
                 <a:ea typeface="+mn-lt"/>
                 <a:cs typeface="+mn-lt"/>
               </a:rPr>
@@ -5422,13 +5422,13 @@
               </a:lnSpc>
             </a:pPr>
             <a:r>
-              <a:rPr lang="ja-JP" sz="1100" b="1">
+              <a:rPr lang="ja-JP" sz="1100" b="1" dirty="0">
                 <a:ea typeface="+mn-lt"/>
                 <a:cs typeface="+mn-lt"/>
               </a:rPr>
               <a:t>① いつもの特典を「今日だけ豪華にする」お知らせ</a:t>
             </a:r>
-            <a:endParaRPr lang="ja-JP" sz="1100" b="1"/>
+            <a:endParaRPr lang="ja-JP" sz="1100" b="1" dirty="0"/>
           </a:p>
           <a:p>
             <a:pPr>
@@ -5437,28 +5437,28 @@
               </a:lnSpc>
             </a:pPr>
             <a:r>
-              <a:rPr lang="ja-JP" sz="1000">
+              <a:rPr lang="ja-JP" sz="1000" dirty="0">
                 <a:ea typeface="+mn-lt"/>
                 <a:cs typeface="+mn-lt"/>
               </a:rPr>
               <a:t>「本日は</a:t>
             </a:r>
             <a:r>
-              <a:rPr lang="en-US" altLang="ja-JP" sz="1000">
+              <a:rPr lang="en-US" altLang="ja-JP" sz="1000" dirty="0">
                 <a:ea typeface="+mn-lt"/>
                 <a:cs typeface="+mn-lt"/>
               </a:rPr>
               <a:t>LINE</a:t>
             </a:r>
             <a:r>
-              <a:rPr lang="ja-JP" sz="1000">
+              <a:rPr lang="ja-JP" sz="1000" dirty="0">
                 <a:ea typeface="+mn-lt"/>
                 <a:cs typeface="+mn-lt"/>
               </a:rPr>
               <a:t>友だち限定で、カニ身ちょ</a:t>
             </a:r>
             <a:r>
-              <a:rPr lang="ja-JP" sz="1000">
+              <a:rPr lang="ja-JP" sz="1000" dirty="0">
                 <a:solidFill>
                   <a:srgbClr val="000000"/>
                 </a:solidFill>
@@ -5468,41 +5468,41 @@
               <a:t>い</a:t>
             </a:r>
             <a:r>
-              <a:rPr lang="ja-JP" sz="1000">
+              <a:rPr lang="ja-JP" sz="1000" dirty="0">
                 <a:ea typeface="+mn-lt"/>
                 <a:cs typeface="+mn-lt"/>
               </a:rPr>
               <a:t>足しを</a:t>
             </a:r>
             <a:r>
-              <a:rPr lang="en-US" altLang="ja-JP" sz="1000">
+              <a:rPr lang="en-US" altLang="ja-JP" sz="1000" dirty="0">
                 <a:ea typeface="+mn-lt"/>
                 <a:cs typeface="+mn-lt"/>
               </a:rPr>
               <a:t>【</a:t>
             </a:r>
             <a:r>
-              <a:rPr lang="ja-JP" sz="1000">
+              <a:rPr lang="ja-JP" sz="1000" dirty="0">
                 <a:ea typeface="+mn-lt"/>
                 <a:cs typeface="+mn-lt"/>
               </a:rPr>
               <a:t>倍量</a:t>
             </a:r>
             <a:r>
-              <a:rPr lang="en-US" altLang="ja-JP" sz="1000">
+              <a:rPr lang="en-US" altLang="ja-JP" sz="1000" dirty="0">
                 <a:ea typeface="+mn-lt"/>
                 <a:cs typeface="+mn-lt"/>
               </a:rPr>
               <a:t>】</a:t>
             </a:r>
             <a:r>
-              <a:rPr lang="ja-JP" sz="1000">
+              <a:rPr lang="ja-JP" sz="1000" dirty="0">
                 <a:ea typeface="+mn-lt"/>
                 <a:cs typeface="+mn-lt"/>
               </a:rPr>
               <a:t>にします！」など、すでにお店にある食材を使ったお得な配信です。新しく特別な商品を用意しなくてもすぐに実施できます。</a:t>
             </a:r>
-            <a:endParaRPr lang="ja-JP" sz="1000"/>
+            <a:endParaRPr lang="ja-JP" sz="1000" dirty="0"/>
           </a:p>
         </p:txBody>
       </p:sp>
@@ -5596,13 +5596,13 @@
               </a:lnSpc>
             </a:pPr>
             <a:r>
-              <a:rPr lang="ja-JP" sz="1300">
+              <a:rPr lang="ja-JP" sz="1300" dirty="0">
                 <a:ea typeface="+mn-lt"/>
                 <a:cs typeface="+mn-lt"/>
               </a:rPr>
               <a:t>パターン①：お店のスタッフ様が配るケース</a:t>
             </a:r>
-            <a:endParaRPr lang="ja-JP"/>
+            <a:endParaRPr lang="ja-JP" dirty="0"/>
           </a:p>
           <a:p>
             <a:pPr>
@@ -5611,34 +5611,34 @@
               </a:lnSpc>
             </a:pPr>
             <a:r>
-              <a:rPr lang="en-US" altLang="ja-JP" sz="1100">
+              <a:rPr lang="en-US" altLang="ja-JP" sz="1100" dirty="0">
                 <a:ea typeface="+mn-lt"/>
                 <a:cs typeface="+mn-lt"/>
               </a:rPr>
               <a:t>【</a:t>
             </a:r>
             <a:r>
-              <a:rPr lang="ja-JP" altLang="en-US" sz="1100">
+              <a:rPr lang="ja-JP" altLang="en-US" sz="1100" dirty="0">
                 <a:ea typeface="+mn-lt"/>
                 <a:cs typeface="+mn-lt"/>
               </a:rPr>
               <a:t>対象</a:t>
             </a:r>
             <a:r>
-              <a:rPr lang="en-US" altLang="ja-JP" sz="1100">
+              <a:rPr lang="en-US" altLang="ja-JP" sz="1100" dirty="0">
                 <a:ea typeface="+mn-lt"/>
                 <a:cs typeface="+mn-lt"/>
               </a:rPr>
               <a:t>】</a:t>
             </a:r>
             <a:r>
-              <a:rPr lang="ja-JP" altLang="en-US" sz="1100">
+              <a:rPr lang="ja-JP" altLang="en-US" sz="1100" dirty="0">
                 <a:ea typeface="+mn-lt"/>
                 <a:cs typeface="+mn-lt"/>
               </a:rPr>
               <a:t>現場の状況に合わせた突発的な配信</a:t>
             </a:r>
-            <a:endParaRPr lang="ja-JP" altLang="en-US" sz="1100"/>
+            <a:endParaRPr lang="ja-JP" altLang="en-US" sz="1100" dirty="0"/>
           </a:p>
           <a:p>
             <a:pPr>
@@ -5647,14 +5647,14 @@
               </a:lnSpc>
             </a:pPr>
             <a:r>
-              <a:rPr lang="ja-JP" altLang="en-US" sz="1100">
+              <a:rPr lang="ja-JP" altLang="en-US" sz="1100" dirty="0">
                 <a:ea typeface="+mn-lt"/>
                 <a:cs typeface="+mn-lt"/>
               </a:rPr>
               <a:t>・「今日はカニの入荷が多いから夕方限定で安くしよう」「急な悪天候だから来店特典を出そう」</a:t>
             </a:r>
             <a:r>
-              <a:rPr lang="ja-JP" sz="1100">
+              <a:rPr lang="ja-JP" sz="1100" dirty="0">
                 <a:ea typeface="+mn-lt"/>
                 <a:cs typeface="+mn-lt"/>
               </a:rPr>
@@ -5679,13 +5679,13 @@
               <a:t>　</a:t>
             </a:r>
             <a:r>
-              <a:rPr lang="ja-JP" sz="1100">
+              <a:rPr lang="ja-JP" sz="1100" dirty="0">
                 <a:ea typeface="+mn-lt"/>
                 <a:cs typeface="+mn-lt"/>
               </a:rPr>
               <a:t>お店から直接配信していただくとタイムリーにお知らせできます。</a:t>
             </a:r>
-            <a:endParaRPr lang="ja-JP" sz="1100"/>
+            <a:endParaRPr lang="ja-JP" sz="1100" dirty="0"/>
           </a:p>
           <a:p>
             <a:pPr>
@@ -5694,41 +5694,41 @@
               </a:lnSpc>
             </a:pPr>
             <a:r>
-              <a:rPr lang="ja-JP" altLang="en-US" sz="1100">
+              <a:rPr lang="ja-JP" altLang="en-US" sz="1100" dirty="0">
                 <a:ea typeface="+mn-lt"/>
                 <a:cs typeface="+mn-lt"/>
               </a:rPr>
               <a:t>・スマホに</a:t>
             </a:r>
             <a:r>
-              <a:rPr lang="en-US" altLang="ja-JP" sz="1100">
+              <a:rPr lang="en-US" altLang="ja-JP" sz="1100" dirty="0">
                 <a:ea typeface="+mn-lt"/>
                 <a:cs typeface="+mn-lt"/>
               </a:rPr>
               <a:t>LINE</a:t>
             </a:r>
             <a:r>
-              <a:rPr lang="ja-JP" altLang="en-US" sz="1100">
+              <a:rPr lang="ja-JP" altLang="en-US" sz="1100" dirty="0">
                 <a:ea typeface="+mn-lt"/>
                 <a:cs typeface="+mn-lt"/>
               </a:rPr>
               <a:t>公式アカウントの管理アプリを入れておけば、</a:t>
             </a:r>
             <a:r>
-              <a:rPr lang="en-US" altLang="ja-JP" sz="1100">
+              <a:rPr lang="en-US" altLang="ja-JP" sz="1100" dirty="0">
                 <a:ea typeface="+mn-lt"/>
                 <a:cs typeface="+mn-lt"/>
               </a:rPr>
               <a:t>1〜2</a:t>
             </a:r>
             <a:r>
-              <a:rPr lang="ja-JP" altLang="en-US" sz="1100">
+              <a:rPr lang="ja-JP" altLang="en-US" sz="1100" dirty="0">
                 <a:ea typeface="+mn-lt"/>
                 <a:cs typeface="+mn-lt"/>
               </a:rPr>
               <a:t>分で簡単に一斉送信できます。</a:t>
             </a:r>
-            <a:endParaRPr lang="ja-JP" sz="1100"/>
+            <a:endParaRPr lang="ja-JP" sz="1100" dirty="0"/>
           </a:p>
         </p:txBody>
       </p:sp>
@@ -5766,41 +5766,41 @@
               </a:lnSpc>
             </a:pPr>
             <a:r>
-              <a:rPr lang="ja-JP" sz="1300">
+              <a:rPr lang="ja-JP" sz="1300" dirty="0">
                 <a:ea typeface="+mn-lt"/>
                 <a:cs typeface="+mn-lt"/>
               </a:rPr>
               <a:t>パターン</a:t>
             </a:r>
             <a:r>
-              <a:rPr lang="ja-JP" altLang="en-US" sz="1300">
+              <a:rPr lang="ja-JP" altLang="en-US" sz="1300" dirty="0">
                 <a:ea typeface="+mn-lt"/>
                 <a:cs typeface="+mn-lt"/>
               </a:rPr>
               <a:t>②</a:t>
             </a:r>
             <a:r>
-              <a:rPr lang="ja-JP" sz="1300">
+              <a:rPr lang="ja-JP" sz="1300" dirty="0">
                 <a:ea typeface="+mn-lt"/>
                 <a:cs typeface="+mn-lt"/>
               </a:rPr>
               <a:t>：</a:t>
             </a:r>
             <a:r>
-              <a:rPr lang="ja-JP" altLang="en-US" sz="1300">
+              <a:rPr lang="ja-JP" altLang="en-US" sz="1300" dirty="0">
                 <a:ea typeface="+mn-lt"/>
                 <a:cs typeface="+mn-lt"/>
               </a:rPr>
               <a:t>弊社</a:t>
             </a:r>
             <a:r>
-              <a:rPr lang="ja-JP" sz="1300">
+              <a:rPr lang="ja-JP" sz="1300" dirty="0">
                 <a:ea typeface="+mn-lt"/>
                 <a:cs typeface="+mn-lt"/>
               </a:rPr>
               <a:t>が配るケース </a:t>
             </a:r>
-            <a:endParaRPr lang="ja-JP"/>
+            <a:endParaRPr lang="ja-JP" dirty="0"/>
           </a:p>
           <a:p>
             <a:pPr>
@@ -5809,28 +5809,28 @@
               </a:lnSpc>
             </a:pPr>
             <a:r>
-              <a:rPr lang="en-US" altLang="ja-JP" sz="1100">
+              <a:rPr lang="en-US" altLang="ja-JP" sz="1100" dirty="0">
                 <a:ea typeface="+mn-lt"/>
                 <a:cs typeface="+mn-lt"/>
               </a:rPr>
               <a:t>【</a:t>
             </a:r>
             <a:r>
-              <a:rPr lang="ja-JP" sz="1100">
+              <a:rPr lang="ja-JP" sz="1100" dirty="0">
                 <a:ea typeface="+mn-lt"/>
                 <a:cs typeface="+mn-lt"/>
               </a:rPr>
               <a:t>対象</a:t>
             </a:r>
             <a:r>
-              <a:rPr lang="en-US" altLang="ja-JP" sz="1100">
+              <a:rPr lang="en-US" altLang="ja-JP" sz="1100" dirty="0">
                 <a:ea typeface="+mn-lt"/>
                 <a:cs typeface="+mn-lt"/>
               </a:rPr>
               <a:t>】</a:t>
             </a:r>
             <a:r>
-              <a:rPr lang="ja-JP" sz="1100">
+              <a:rPr lang="ja-JP" sz="1100" dirty="0">
                 <a:ea typeface="+mn-lt"/>
                 <a:cs typeface="+mn-lt"/>
               </a:rPr>
@@ -5844,55 +5844,55 @@
               </a:lnSpc>
             </a:pPr>
             <a:r>
-              <a:rPr lang="ja-JP" sz="1100">
+              <a:rPr lang="ja-JP" sz="1100" dirty="0">
                 <a:ea typeface="+mn-lt"/>
                 <a:cs typeface="+mn-lt"/>
               </a:rPr>
               <a:t>・「毎月〇日の定期配信」や「年末年始・季節のキャ</a:t>
             </a:r>
             <a:r>
-              <a:rPr lang="ja-JP" altLang="en-US" sz="1100">
+              <a:rPr lang="ja-JP" altLang="en-US" sz="1100" dirty="0">
                 <a:ea typeface="+mn-lt"/>
                 <a:cs typeface="+mn-lt"/>
               </a:rPr>
               <a:t>ンペーン</a:t>
             </a:r>
             <a:r>
-              <a:rPr lang="ja-JP" sz="1100">
+              <a:rPr lang="ja-JP" sz="1100" dirty="0">
                 <a:ea typeface="+mn-lt"/>
                 <a:cs typeface="+mn-lt"/>
               </a:rPr>
               <a:t>」</a:t>
             </a:r>
             <a:r>
-              <a:rPr lang="ja-JP" altLang="en-US" sz="1100">
+              <a:rPr lang="ja-JP" altLang="en-US" sz="1100" dirty="0">
                 <a:ea typeface="+mn-lt"/>
                 <a:cs typeface="+mn-lt"/>
               </a:rPr>
               <a:t>など、事前にスケジュールが決ま</a:t>
             </a:r>
             <a:r>
-              <a:rPr lang="ja-JP" sz="1100">
+              <a:rPr lang="ja-JP" sz="1100" dirty="0">
                 <a:ea typeface="+mn-lt"/>
                 <a:cs typeface="+mn-lt"/>
               </a:rPr>
               <a:t>ってい</a:t>
             </a:r>
             <a:r>
-              <a:rPr lang="ja-JP" altLang="en-US" sz="1100">
+              <a:rPr lang="ja-JP" altLang="en-US" sz="1100" dirty="0">
                 <a:ea typeface="+mn-lt"/>
                 <a:cs typeface="+mn-lt"/>
               </a:rPr>
               <a:t>るものが対象</a:t>
             </a:r>
             <a:r>
-              <a:rPr lang="ja-JP" sz="1100">
+              <a:rPr lang="ja-JP" sz="1100" dirty="0">
                 <a:ea typeface="+mn-lt"/>
                 <a:cs typeface="+mn-lt"/>
               </a:rPr>
               <a:t>です。</a:t>
             </a:r>
-            <a:endParaRPr lang="ja-JP" altLang="en-US" sz="1100"/>
+            <a:endParaRPr lang="ja-JP" altLang="en-US" sz="1100" dirty="0"/>
           </a:p>
           <a:p>
             <a:pPr>
@@ -5901,7 +5901,7 @@
               </a:lnSpc>
             </a:pPr>
             <a:r>
-              <a:rPr lang="ja-JP" sz="1100">
+              <a:rPr lang="ja-JP" sz="1100" dirty="0">
                 <a:ea typeface="+mn-lt"/>
                 <a:cs typeface="+mn-lt"/>
               </a:rPr>
@@ -7102,13 +7102,13 @@
               </a:lnSpc>
             </a:pPr>
             <a:r>
-              <a:rPr lang="ja-JP" sz="1100" b="1">
+              <a:rPr lang="ja-JP" sz="1100" b="1" dirty="0">
                 <a:ea typeface="+mn-lt"/>
                 <a:cs typeface="+mn-lt"/>
               </a:rPr>
               <a:t>STEP 1：1枚ずつラミネート加工</a:t>
             </a:r>
-            <a:endParaRPr lang="ja-JP" altLang="en-US" b="1">
+            <a:endParaRPr lang="ja-JP" altLang="en-US" b="1" dirty="0">
               <a:ea typeface="+mn-lt"/>
               <a:cs typeface="+mn-lt"/>
             </a:endParaRPr>
@@ -7120,104 +7120,104 @@
               </a:lnSpc>
             </a:pPr>
             <a:r>
-              <a:rPr lang="ja-JP" altLang="en-US" sz="1000">
+              <a:rPr lang="ja-JP" altLang="en-US" sz="1000" dirty="0">
                 <a:ea typeface="+mn-lt"/>
                 <a:cs typeface="+mn-lt"/>
               </a:rPr>
               <a:t>付与</a:t>
             </a:r>
             <a:r>
-              <a:rPr lang="ja-JP" sz="1000">
+              <a:rPr lang="ja-JP" sz="1000" dirty="0">
                 <a:ea typeface="+mn-lt"/>
                 <a:cs typeface="+mn-lt"/>
               </a:rPr>
               <a:t>ポイント</a:t>
             </a:r>
             <a:r>
-              <a:rPr lang="ja-JP" altLang="en-US" sz="1000">
+              <a:rPr lang="ja-JP" altLang="en-US" sz="1000" dirty="0">
                 <a:ea typeface="+mn-lt"/>
                 <a:cs typeface="+mn-lt"/>
               </a:rPr>
               <a:t>ご</a:t>
             </a:r>
             <a:r>
-              <a:rPr lang="ja-JP" sz="1000">
+              <a:rPr lang="ja-JP" sz="1000" dirty="0">
                 <a:ea typeface="+mn-lt"/>
                 <a:cs typeface="+mn-lt"/>
               </a:rPr>
               <a:t>と（1pt〜5pt等）に</a:t>
             </a:r>
             <a:r>
-              <a:rPr lang="ja-JP" altLang="en-US" sz="1000">
+              <a:rPr lang="ja-JP" altLang="en-US" sz="1000" dirty="0">
                 <a:ea typeface="+mn-lt"/>
                 <a:cs typeface="+mn-lt"/>
               </a:rPr>
               <a:t>ハガキサイズ等で「</a:t>
             </a:r>
             <a:r>
-              <a:rPr lang="ja-JP" sz="1000">
+              <a:rPr lang="ja-JP" sz="1000" dirty="0">
                 <a:ea typeface="+mn-lt"/>
                 <a:cs typeface="+mn-lt"/>
               </a:rPr>
               <a:t>ポイント</a:t>
             </a:r>
             <a:r>
-              <a:rPr lang="ja-JP" altLang="en-US" sz="1000">
+              <a:rPr lang="ja-JP" altLang="en-US" sz="1000" dirty="0">
                 <a:ea typeface="+mn-lt"/>
                 <a:cs typeface="+mn-lt"/>
               </a:rPr>
               <a:t>数＋大きな</a:t>
             </a:r>
             <a:r>
-              <a:rPr lang="en-US" altLang="ja-JP" sz="1000">
+              <a:rPr lang="en-US" altLang="ja-JP" sz="1000" dirty="0">
                 <a:ea typeface="+mn-lt"/>
                 <a:cs typeface="+mn-lt"/>
               </a:rPr>
               <a:t>QR</a:t>
             </a:r>
             <a:r>
-              <a:rPr lang="ja-JP" altLang="en-US" sz="1000">
+              <a:rPr lang="ja-JP" altLang="en-US" sz="1000" dirty="0">
                 <a:ea typeface="+mn-lt"/>
                 <a:cs typeface="+mn-lt"/>
               </a:rPr>
               <a:t>コード」</a:t>
             </a:r>
             <a:r>
-              <a:rPr lang="ja-JP" sz="1000">
+              <a:rPr lang="ja-JP" sz="1000" dirty="0">
                 <a:ea typeface="+mn-lt"/>
                 <a:cs typeface="+mn-lt"/>
               </a:rPr>
               <a:t>を</a:t>
             </a:r>
             <a:r>
-              <a:rPr lang="en-US" altLang="ja-JP" sz="1000">
+              <a:rPr lang="en-US" altLang="ja-JP" sz="1000" dirty="0">
                 <a:ea typeface="+mn-lt"/>
                 <a:cs typeface="+mn-lt"/>
               </a:rPr>
               <a:t>1</a:t>
             </a:r>
             <a:r>
-              <a:rPr lang="ja-JP" altLang="en-US" sz="1000">
+              <a:rPr lang="ja-JP" altLang="en-US" sz="1000" dirty="0">
                 <a:ea typeface="+mn-lt"/>
                 <a:cs typeface="+mn-lt"/>
               </a:rPr>
               <a:t>枚ずつ作成し、ラミネート加工</a:t>
             </a:r>
             <a:r>
-              <a:rPr lang="ja-JP" sz="1000">
+              <a:rPr lang="ja-JP" sz="1000" dirty="0">
                 <a:ea typeface="+mn-lt"/>
                 <a:cs typeface="+mn-lt"/>
               </a:rPr>
               <a:t>します</a:t>
             </a:r>
             <a:r>
-              <a:rPr lang="ja-JP" altLang="en-US" sz="1000">
+              <a:rPr lang="ja-JP" altLang="en-US" sz="1000" dirty="0">
                 <a:ea typeface="+mn-lt"/>
                 <a:cs typeface="+mn-lt"/>
               </a:rPr>
               <a:t>。</a:t>
             </a:r>
-            <a:endParaRPr lang="ja-JP" sz="1000">
+            <a:endParaRPr lang="ja-JP" sz="1000" dirty="0">
               <a:ea typeface="+mn-lt"/>
               <a:cs typeface="+mn-lt"/>
             </a:endParaRPr>
@@ -7509,34 +7509,34 @@
               </a:lnSpc>
             </a:pPr>
             <a:r>
-              <a:rPr lang="ja-JP" sz="1100" b="1">
+              <a:rPr lang="ja-JP" sz="1100" b="1" dirty="0">
                 <a:ea typeface="+mn-lt"/>
                 <a:cs typeface="+mn-lt"/>
               </a:rPr>
               <a:t>STEP </a:t>
             </a:r>
             <a:r>
-              <a:rPr lang="en-US" altLang="ja-JP" sz="1100" b="1">
+              <a:rPr lang="en-US" altLang="ja-JP" sz="1100" b="1" dirty="0">
                 <a:ea typeface="+mn-lt"/>
                 <a:cs typeface="+mn-lt"/>
               </a:rPr>
               <a:t>3</a:t>
             </a:r>
             <a:r>
-              <a:rPr lang="ja-JP" sz="1100" b="1">
+              <a:rPr lang="ja-JP" sz="1100" b="1" dirty="0">
                 <a:ea typeface="+mn-lt"/>
                 <a:cs typeface="+mn-lt"/>
               </a:rPr>
               <a:t>：</a:t>
             </a:r>
             <a:r>
-              <a:rPr lang="ja-JP" altLang="en-US" sz="1100" b="1">
+              <a:rPr lang="ja-JP" altLang="en-US" sz="1100" b="1" dirty="0">
                 <a:ea typeface="+mn-lt"/>
                 <a:cs typeface="+mn-lt"/>
               </a:rPr>
               <a:t>お会計金額に応じて提示 </a:t>
             </a:r>
-            <a:endParaRPr lang="ja-JP" b="1"/>
+            <a:endParaRPr lang="ja-JP" b="1" dirty="0"/>
           </a:p>
           <a:p>
             <a:pPr>
@@ -7545,70 +7545,70 @@
               </a:lnSpc>
             </a:pPr>
             <a:r>
-              <a:rPr lang="ja-JP" sz="1000">
+              <a:rPr lang="ja-JP" sz="1000" dirty="0">
                 <a:ea typeface="+mn-lt"/>
                 <a:cs typeface="+mn-lt"/>
               </a:rPr>
               <a:t>1,000円＝1ptとし、お会計</a:t>
             </a:r>
             <a:r>
-              <a:rPr lang="en-US" altLang="ja-JP" sz="1000">
+              <a:rPr lang="en-US" altLang="ja-JP" sz="1000" dirty="0">
                 <a:ea typeface="+mn-lt"/>
                 <a:cs typeface="+mn-lt"/>
               </a:rPr>
               <a:t>2,000</a:t>
             </a:r>
             <a:r>
-              <a:rPr lang="ja-JP" sz="1000">
+              <a:rPr lang="ja-JP" sz="1000" dirty="0">
                 <a:ea typeface="+mn-lt"/>
                 <a:cs typeface="+mn-lt"/>
               </a:rPr>
               <a:t>円なら「</a:t>
             </a:r>
             <a:r>
-              <a:rPr lang="en-US" altLang="ja-JP" sz="1000">
+              <a:rPr lang="en-US" altLang="ja-JP" sz="1000" dirty="0">
                 <a:ea typeface="+mn-lt"/>
                 <a:cs typeface="+mn-lt"/>
               </a:rPr>
               <a:t>2pt</a:t>
             </a:r>
             <a:r>
-              <a:rPr lang="ja-JP" sz="1000">
+              <a:rPr lang="ja-JP" sz="1000" dirty="0">
                 <a:ea typeface="+mn-lt"/>
                 <a:cs typeface="+mn-lt"/>
               </a:rPr>
               <a:t>」、5,000円なら「5pt</a:t>
             </a:r>
             <a:r>
-              <a:rPr lang="ja-JP" altLang="en-US" sz="1000">
+              <a:rPr lang="ja-JP" altLang="en-US" sz="1000" dirty="0">
                 <a:ea typeface="+mn-lt"/>
                 <a:cs typeface="+mn-lt"/>
               </a:rPr>
               <a:t>」</a:t>
             </a:r>
             <a:r>
-              <a:rPr lang="ja-JP" sz="1000">
+              <a:rPr lang="ja-JP" sz="1000" dirty="0">
                 <a:ea typeface="+mn-lt"/>
                 <a:cs typeface="+mn-lt"/>
               </a:rPr>
               <a:t>のカードをスタッフ様がめくって提示</a:t>
             </a:r>
             <a:r>
-              <a:rPr lang="ja-JP" altLang="en-US" sz="1000">
+              <a:rPr lang="ja-JP" altLang="en-US" sz="1000" dirty="0">
                 <a:ea typeface="+mn-lt"/>
                 <a:cs typeface="+mn-lt"/>
               </a:rPr>
               <a:t>する</a:t>
             </a:r>
             <a:r>
-              <a:rPr lang="ja-JP" sz="1000">
+              <a:rPr lang="ja-JP" sz="1000" dirty="0">
                 <a:ea typeface="+mn-lt"/>
                 <a:cs typeface="+mn-lt"/>
               </a:rPr>
               <a:t>形で</a:t>
             </a:r>
             <a:r>
-              <a:rPr lang="ja-JP" altLang="en-US" sz="1000">
+              <a:rPr lang="ja-JP" altLang="en-US" sz="1000" dirty="0">
                 <a:ea typeface="+mn-lt"/>
                 <a:cs typeface="+mn-lt"/>
               </a:rPr>
@@ -8755,10 +8755,10 @@
       </p:sp>
       <p:pic>
         <p:nvPicPr>
-          <p:cNvPr id="4" name="図 3">
+          <p:cNvPr id="6" name="図 5">
             <a:extLst>
               <a:ext uri="{FF2B5EF4-FFF2-40B4-BE49-F238E27FC236}">
-                <a16:creationId xmlns:a16="http://schemas.microsoft.com/office/drawing/2014/main" id="{A67DBAA7-A96B-77CC-DB11-0DBAE7C12080}"/>
+                <a16:creationId xmlns:a16="http://schemas.microsoft.com/office/drawing/2014/main" id="{07EED5CD-2A3C-26AD-851D-765FA0A9C58C}"/>
               </a:ext>
             </a:extLst>
           </p:cNvPr>
@@ -8775,7 +8775,7 @@
         </p:blipFill>
         <p:spPr>
           <a:xfrm>
-            <a:off x="4870778" y="1485633"/>
+            <a:off x="4869436" y="1485633"/>
             <a:ext cx="2788920" cy="3955915"/>
           </a:xfrm>
           <a:prstGeom prst="rect">
@@ -8792,10 +8792,10 @@
       </p:pic>
       <p:pic>
         <p:nvPicPr>
-          <p:cNvPr id="7" name="図 6">
+          <p:cNvPr id="9" name="図 8">
             <a:extLst>
               <a:ext uri="{FF2B5EF4-FFF2-40B4-BE49-F238E27FC236}">
-                <a16:creationId xmlns:a16="http://schemas.microsoft.com/office/drawing/2014/main" id="{1ACC9BFE-9ED9-B237-6315-263E97F86F2A}"/>
+                <a16:creationId xmlns:a16="http://schemas.microsoft.com/office/drawing/2014/main" id="{EFD2BD27-1020-719A-E754-6790F0A78B0F}"/>
               </a:ext>
             </a:extLst>
           </p:cNvPr>
@@ -8812,7 +8812,7 @@
         </p:blipFill>
         <p:spPr>
           <a:xfrm>
-            <a:off x="7806481" y="2742636"/>
+            <a:off x="7817693" y="2742636"/>
             <a:ext cx="1694917" cy="2698912"/>
           </a:xfrm>
           <a:prstGeom prst="rect">
